--- a/Konsep system Plane.pptx
+++ b/Konsep system Plane.pptx
@@ -5,7 +5,7 @@
     <p:sldMasterId id="2147483648" r:id="rId1"/>
   </p:sldMasterIdLst>
   <p:notesMasterIdLst>
-    <p:notesMasterId r:id="rId17"/>
+    <p:notesMasterId r:id="rId18"/>
   </p:notesMasterIdLst>
   <p:sldIdLst>
     <p:sldId id="256" r:id="rId2"/>
@@ -20,9 +20,10 @@
     <p:sldId id="265" r:id="rId11"/>
     <p:sldId id="266" r:id="rId12"/>
     <p:sldId id="269" r:id="rId13"/>
-    <p:sldId id="267" r:id="rId14"/>
-    <p:sldId id="268" r:id="rId15"/>
-    <p:sldId id="270" r:id="rId16"/>
+    <p:sldId id="271" r:id="rId14"/>
+    <p:sldId id="267" r:id="rId15"/>
+    <p:sldId id="268" r:id="rId16"/>
+    <p:sldId id="270" r:id="rId17"/>
   </p:sldIdLst>
   <p:sldSz cx="12192000" cy="6858000"/>
   <p:notesSz cx="6858000" cy="9144000"/>
@@ -211,7 +212,7 @@
           <a:p>
             <a:fld id="{FB994781-931C-4905-B707-3BA0F7291A15}" type="datetimeFigureOut">
               <a:rPr lang="en-ID" smtClean="0"/>
-              <a:t>26/08/2026</a:t>
+              <a:t>28/08/2026</a:t>
             </a:fld>
             <a:endParaRPr lang="en-ID"/>
           </a:p>
@@ -883,7 +884,7 @@
     </p:spTree>
     <p:extLst>
       <p:ext uri="{BB962C8B-B14F-4D97-AF65-F5344CB8AC3E}">
-        <p14:creationId xmlns:p14="http://schemas.microsoft.com/office/powerpoint/2010/main" val="3221789678"/>
+        <p14:creationId xmlns:p14="http://schemas.microsoft.com/office/powerpoint/2010/main" val="2506645134"/>
       </p:ext>
     </p:extLst>
   </p:cSld>
@@ -991,7 +992,7 @@
     </p:spTree>
     <p:extLst>
       <p:ext uri="{BB962C8B-B14F-4D97-AF65-F5344CB8AC3E}">
-        <p14:creationId xmlns:p14="http://schemas.microsoft.com/office/powerpoint/2010/main" val="229130276"/>
+        <p14:creationId xmlns:p14="http://schemas.microsoft.com/office/powerpoint/2010/main" val="3221789678"/>
       </p:ext>
     </p:extLst>
   </p:cSld>
@@ -1091,6 +1092,114 @@
             <a:fld id="{F9D989C4-5A0E-49B3-B69E-CB0F2EA8AEC2}" type="slidenum">
               <a:rPr lang="en-ID" smtClean="0"/>
               <a:t>15</a:t>
+            </a:fld>
+            <a:endParaRPr lang="en-ID"/>
+          </a:p>
+        </p:txBody>
+      </p:sp>
+    </p:spTree>
+    <p:extLst>
+      <p:ext uri="{BB962C8B-B14F-4D97-AF65-F5344CB8AC3E}">
+        <p14:creationId xmlns:p14="http://schemas.microsoft.com/office/powerpoint/2010/main" val="229130276"/>
+      </p:ext>
+    </p:extLst>
+  </p:cSld>
+  <p:clrMapOvr>
+    <a:masterClrMapping/>
+  </p:clrMapOvr>
+</p:notes>
+</file>
+
+<file path=ppt/notesSlides/notesSlide15.xml><?xml version="1.0" encoding="utf-8"?>
+<p:notes xmlns:a="http://schemas.openxmlformats.org/drawingml/2006/main" xmlns:r="http://schemas.openxmlformats.org/officeDocument/2006/relationships" xmlns:p="http://schemas.openxmlformats.org/presentationml/2006/main">
+  <p:cSld>
+    <p:spTree>
+      <p:nvGrpSpPr>
+        <p:cNvPr id="1" name="">
+          <a:extLst>
+            <a:ext uri="{FF2B5EF4-FFF2-40B4-BE49-F238E27FC236}">
+              <a16:creationId xmlns:a16="http://schemas.microsoft.com/office/drawing/2014/main" id="{0FCA28D0-40C2-4BDF-0D8A-65EB1DD20FC5}"/>
+            </a:ext>
+          </a:extLst>
+        </p:cNvPr>
+        <p:cNvGrpSpPr/>
+        <p:nvPr/>
+      </p:nvGrpSpPr>
+      <p:grpSpPr>
+        <a:xfrm>
+          <a:off x="0" y="0"/>
+          <a:ext cx="0" cy="0"/>
+          <a:chOff x="0" y="0"/>
+          <a:chExt cx="0" cy="0"/>
+        </a:xfrm>
+      </p:grpSpPr>
+      <p:sp>
+        <p:nvSpPr>
+          <p:cNvPr id="2" name="Slide Image Placeholder 1">
+            <a:extLst>
+              <a:ext uri="{FF2B5EF4-FFF2-40B4-BE49-F238E27FC236}">
+                <a16:creationId xmlns:a16="http://schemas.microsoft.com/office/drawing/2014/main" id="{C0016825-5438-43B6-AC8B-992AA4B83CEB}"/>
+              </a:ext>
+            </a:extLst>
+          </p:cNvPr>
+          <p:cNvSpPr>
+            <a:spLocks noGrp="1" noRot="1" noChangeAspect="1"/>
+          </p:cNvSpPr>
+          <p:nvPr>
+            <p:ph type="sldImg"/>
+          </p:nvPr>
+        </p:nvSpPr>
+        <p:spPr/>
+      </p:sp>
+      <p:sp>
+        <p:nvSpPr>
+          <p:cNvPr id="3" name="Notes Placeholder 2">
+            <a:extLst>
+              <a:ext uri="{FF2B5EF4-FFF2-40B4-BE49-F238E27FC236}">
+                <a16:creationId xmlns:a16="http://schemas.microsoft.com/office/drawing/2014/main" id="{7A9E2EC2-7D8C-C2E9-3251-CC292747305F}"/>
+              </a:ext>
+            </a:extLst>
+          </p:cNvPr>
+          <p:cNvSpPr>
+            <a:spLocks noGrp="1"/>
+          </p:cNvSpPr>
+          <p:nvPr>
+            <p:ph type="body" idx="1"/>
+          </p:nvPr>
+        </p:nvSpPr>
+        <p:spPr/>
+        <p:txBody>
+          <a:bodyPr/>
+          <a:lstStyle/>
+          <a:p>
+            <a:endParaRPr lang="en-ID" dirty="0"/>
+          </a:p>
+        </p:txBody>
+      </p:sp>
+      <p:sp>
+        <p:nvSpPr>
+          <p:cNvPr id="4" name="Slide Number Placeholder 3">
+            <a:extLst>
+              <a:ext uri="{FF2B5EF4-FFF2-40B4-BE49-F238E27FC236}">
+                <a16:creationId xmlns:a16="http://schemas.microsoft.com/office/drawing/2014/main" id="{BD0BCDB0-934C-88D4-7C29-691CA75CF9A6}"/>
+              </a:ext>
+            </a:extLst>
+          </p:cNvPr>
+          <p:cNvSpPr>
+            <a:spLocks noGrp="1"/>
+          </p:cNvSpPr>
+          <p:nvPr>
+            <p:ph type="sldNum" sz="quarter" idx="5"/>
+          </p:nvPr>
+        </p:nvSpPr>
+        <p:spPr/>
+        <p:txBody>
+          <a:bodyPr/>
+          <a:lstStyle/>
+          <a:p>
+            <a:fld id="{F9D989C4-5A0E-49B3-B69E-CB0F2EA8AEC2}" type="slidenum">
+              <a:rPr lang="en-ID" smtClean="0"/>
+              <a:t>16</a:t>
             </a:fld>
             <a:endParaRPr lang="en-ID"/>
           </a:p>
@@ -2122,7 +2231,7 @@
           <a:p>
             <a:fld id="{E7B131E9-EDDC-4B14-9B4F-1B5D6B6DBCCA}" type="datetimeFigureOut">
               <a:rPr lang="en-ID" smtClean="0"/>
-              <a:t>26/08/2026</a:t>
+              <a:t>28/08/2026</a:t>
             </a:fld>
             <a:endParaRPr lang="en-ID"/>
           </a:p>
@@ -2322,7 +2431,7 @@
           <a:p>
             <a:fld id="{E7B131E9-EDDC-4B14-9B4F-1B5D6B6DBCCA}" type="datetimeFigureOut">
               <a:rPr lang="en-ID" smtClean="0"/>
-              <a:t>26/08/2026</a:t>
+              <a:t>28/08/2026</a:t>
             </a:fld>
             <a:endParaRPr lang="en-ID"/>
           </a:p>
@@ -2532,7 +2641,7 @@
           <a:p>
             <a:fld id="{E7B131E9-EDDC-4B14-9B4F-1B5D6B6DBCCA}" type="datetimeFigureOut">
               <a:rPr lang="en-ID" smtClean="0"/>
-              <a:t>26/08/2026</a:t>
+              <a:t>28/08/2026</a:t>
             </a:fld>
             <a:endParaRPr lang="en-ID"/>
           </a:p>
@@ -2732,7 +2841,7 @@
           <a:p>
             <a:fld id="{E7B131E9-EDDC-4B14-9B4F-1B5D6B6DBCCA}" type="datetimeFigureOut">
               <a:rPr lang="en-ID" smtClean="0"/>
-              <a:t>26/08/2026</a:t>
+              <a:t>28/08/2026</a:t>
             </a:fld>
             <a:endParaRPr lang="en-ID"/>
           </a:p>
@@ -3008,7 +3117,7 @@
           <a:p>
             <a:fld id="{E7B131E9-EDDC-4B14-9B4F-1B5D6B6DBCCA}" type="datetimeFigureOut">
               <a:rPr lang="en-ID" smtClean="0"/>
-              <a:t>26/08/2026</a:t>
+              <a:t>28/08/2026</a:t>
             </a:fld>
             <a:endParaRPr lang="en-ID"/>
           </a:p>
@@ -3276,7 +3385,7 @@
           <a:p>
             <a:fld id="{E7B131E9-EDDC-4B14-9B4F-1B5D6B6DBCCA}" type="datetimeFigureOut">
               <a:rPr lang="en-ID" smtClean="0"/>
-              <a:t>26/08/2026</a:t>
+              <a:t>28/08/2026</a:t>
             </a:fld>
             <a:endParaRPr lang="en-ID"/>
           </a:p>
@@ -3691,7 +3800,7 @@
           <a:p>
             <a:fld id="{E7B131E9-EDDC-4B14-9B4F-1B5D6B6DBCCA}" type="datetimeFigureOut">
               <a:rPr lang="en-ID" smtClean="0"/>
-              <a:t>26/08/2026</a:t>
+              <a:t>28/08/2026</a:t>
             </a:fld>
             <a:endParaRPr lang="en-ID"/>
           </a:p>
@@ -3833,7 +3942,7 @@
           <a:p>
             <a:fld id="{E7B131E9-EDDC-4B14-9B4F-1B5D6B6DBCCA}" type="datetimeFigureOut">
               <a:rPr lang="en-ID" smtClean="0"/>
-              <a:t>26/08/2026</a:t>
+              <a:t>28/08/2026</a:t>
             </a:fld>
             <a:endParaRPr lang="en-ID"/>
           </a:p>
@@ -3946,7 +4055,7 @@
           <a:p>
             <a:fld id="{E7B131E9-EDDC-4B14-9B4F-1B5D6B6DBCCA}" type="datetimeFigureOut">
               <a:rPr lang="en-ID" smtClean="0"/>
-              <a:t>26/08/2026</a:t>
+              <a:t>28/08/2026</a:t>
             </a:fld>
             <a:endParaRPr lang="en-ID"/>
           </a:p>
@@ -4259,7 +4368,7 @@
           <a:p>
             <a:fld id="{E7B131E9-EDDC-4B14-9B4F-1B5D6B6DBCCA}" type="datetimeFigureOut">
               <a:rPr lang="en-ID" smtClean="0"/>
-              <a:t>26/08/2026</a:t>
+              <a:t>28/08/2026</a:t>
             </a:fld>
             <a:endParaRPr lang="en-ID"/>
           </a:p>
@@ -4548,7 +4657,7 @@
           <a:p>
             <a:fld id="{E7B131E9-EDDC-4B14-9B4F-1B5D6B6DBCCA}" type="datetimeFigureOut">
               <a:rPr lang="en-ID" smtClean="0"/>
-              <a:t>26/08/2026</a:t>
+              <a:t>28/08/2026</a:t>
             </a:fld>
             <a:endParaRPr lang="en-ID"/>
           </a:p>
@@ -4791,7 +4900,7 @@
           <a:p>
             <a:fld id="{E7B131E9-EDDC-4B14-9B4F-1B5D6B6DBCCA}" type="datetimeFigureOut">
               <a:rPr lang="en-ID" smtClean="0"/>
-              <a:t>26/08/2026</a:t>
+              <a:t>28/08/2026</a:t>
             </a:fld>
             <a:endParaRPr lang="en-ID"/>
           </a:p>
@@ -17778,6 +17887,2032 @@
             </a:r>
             <a:r>
               <a:rPr lang="en-US" dirty="0"/>
+              <a:t> Flow Andon</a:t>
+            </a:r>
+            <a:endParaRPr lang="en-ID" dirty="0"/>
+          </a:p>
+        </p:txBody>
+      </p:sp>
+      <p:sp>
+        <p:nvSpPr>
+          <p:cNvPr id="57" name="Shape 5">
+            <a:extLst>
+              <a:ext uri="{FF2B5EF4-FFF2-40B4-BE49-F238E27FC236}">
+                <a16:creationId xmlns:a16="http://schemas.microsoft.com/office/drawing/2014/main" id="{ED3D0A93-E752-C56B-7CF7-A7CB8EF80E60}"/>
+              </a:ext>
+            </a:extLst>
+          </p:cNvPr>
+          <p:cNvSpPr/>
+          <p:nvPr/>
+        </p:nvSpPr>
+        <p:spPr>
+          <a:xfrm>
+            <a:off x="163808" y="687846"/>
+            <a:ext cx="11846484" cy="5980289"/>
+          </a:xfrm>
+          <a:prstGeom prst="roundRect">
+            <a:avLst>
+              <a:gd name="adj" fmla="val 1094"/>
+            </a:avLst>
+          </a:prstGeom>
+          <a:solidFill>
+            <a:srgbClr val="EAF1FA"/>
+          </a:solidFill>
+          <a:ln w="12700">
+            <a:solidFill>
+              <a:srgbClr val="C5D5EA"/>
+            </a:solidFill>
+            <a:prstDash val="solid"/>
+          </a:ln>
+          <a:effectLst>
+            <a:outerShdw blurRad="63500" dist="19050" dir="5400000" algn="bl" rotWithShape="0">
+              <a:srgbClr val="000000">
+                <a:alpha val="10000"/>
+              </a:srgbClr>
+            </a:outerShdw>
+          </a:effectLst>
+        </p:spPr>
+        <p:txBody>
+          <a:bodyPr/>
+          <a:lstStyle/>
+          <a:p>
+            <a:endParaRPr lang="en-US" dirty="0"/>
+          </a:p>
+        </p:txBody>
+      </p:sp>
+      <p:sp>
+        <p:nvSpPr>
+          <p:cNvPr id="7" name="Shape 5">
+            <a:extLst>
+              <a:ext uri="{FF2B5EF4-FFF2-40B4-BE49-F238E27FC236}">
+                <a16:creationId xmlns:a16="http://schemas.microsoft.com/office/drawing/2014/main" id="{0B631645-BD7D-F097-632C-BB8DD9C5CB4B}"/>
+              </a:ext>
+            </a:extLst>
+          </p:cNvPr>
+          <p:cNvSpPr/>
+          <p:nvPr/>
+        </p:nvSpPr>
+        <p:spPr>
+          <a:xfrm>
+            <a:off x="163808" y="687847"/>
+            <a:ext cx="477415" cy="5980290"/>
+          </a:xfrm>
+          <a:prstGeom prst="roundRect">
+            <a:avLst>
+              <a:gd name="adj" fmla="val 1094"/>
+            </a:avLst>
+          </a:prstGeom>
+          <a:solidFill>
+            <a:schemeClr val="bg1"/>
+          </a:solidFill>
+          <a:ln w="12700">
+            <a:solidFill>
+              <a:srgbClr val="C5D5EA"/>
+            </a:solidFill>
+            <a:prstDash val="solid"/>
+          </a:ln>
+          <a:effectLst>
+            <a:outerShdw blurRad="63500" dist="19050" dir="5400000" algn="bl" rotWithShape="0">
+              <a:srgbClr val="000000">
+                <a:alpha val="10000"/>
+              </a:srgbClr>
+            </a:outerShdw>
+          </a:effectLst>
+        </p:spPr>
+        <p:txBody>
+          <a:bodyPr/>
+          <a:lstStyle/>
+          <a:p>
+            <a:endParaRPr lang="en-US" dirty="0"/>
+          </a:p>
+        </p:txBody>
+      </p:sp>
+      <p:sp>
+        <p:nvSpPr>
+          <p:cNvPr id="5" name="Shape 5">
+            <a:extLst>
+              <a:ext uri="{FF2B5EF4-FFF2-40B4-BE49-F238E27FC236}">
+                <a16:creationId xmlns:a16="http://schemas.microsoft.com/office/drawing/2014/main" id="{255513BF-B66F-8B80-203B-4FEE097EA70F}"/>
+              </a:ext>
+            </a:extLst>
+          </p:cNvPr>
+          <p:cNvSpPr/>
+          <p:nvPr/>
+        </p:nvSpPr>
+        <p:spPr>
+          <a:xfrm>
+            <a:off x="172758" y="687847"/>
+            <a:ext cx="11837534" cy="1061660"/>
+          </a:xfrm>
+          <a:prstGeom prst="roundRect">
+            <a:avLst>
+              <a:gd name="adj" fmla="val 1094"/>
+            </a:avLst>
+          </a:prstGeom>
+          <a:noFill/>
+          <a:ln w="12700">
+            <a:solidFill>
+              <a:srgbClr val="C5D5EA"/>
+            </a:solidFill>
+            <a:prstDash val="solid"/>
+          </a:ln>
+          <a:effectLst>
+            <a:outerShdw blurRad="63500" dist="19050" dir="5400000" algn="bl" rotWithShape="0">
+              <a:srgbClr val="000000">
+                <a:alpha val="10000"/>
+              </a:srgbClr>
+            </a:outerShdw>
+          </a:effectLst>
+        </p:spPr>
+        <p:txBody>
+          <a:bodyPr/>
+          <a:lstStyle/>
+          <a:p>
+            <a:endParaRPr lang="en-US" dirty="0"/>
+          </a:p>
+        </p:txBody>
+      </p:sp>
+      <p:sp>
+        <p:nvSpPr>
+          <p:cNvPr id="14" name="Shape 6">
+            <a:extLst>
+              <a:ext uri="{FF2B5EF4-FFF2-40B4-BE49-F238E27FC236}">
+                <a16:creationId xmlns:a16="http://schemas.microsoft.com/office/drawing/2014/main" id="{17653C7A-BAF2-8935-3C05-86577FE40C1E}"/>
+              </a:ext>
+            </a:extLst>
+          </p:cNvPr>
+          <p:cNvSpPr/>
+          <p:nvPr/>
+        </p:nvSpPr>
+        <p:spPr>
+          <a:xfrm rot="16200000">
+            <a:off x="-469977" y="1056305"/>
+            <a:ext cx="1787748" cy="384048"/>
+          </a:xfrm>
+          <a:prstGeom prst="roundRect">
+            <a:avLst>
+              <a:gd name="adj" fmla="val 14286"/>
+            </a:avLst>
+          </a:prstGeom>
+          <a:noFill/>
+          <a:ln w="19050">
+            <a:noFill/>
+            <a:prstDash val="solid"/>
+          </a:ln>
+          <a:effectLst>
+            <a:outerShdw blurRad="63500" dist="19050" dir="5400000" algn="bl" rotWithShape="0">
+              <a:srgbClr val="000000">
+                <a:alpha val="10000"/>
+              </a:srgbClr>
+            </a:outerShdw>
+          </a:effectLst>
+        </p:spPr>
+        <p:txBody>
+          <a:bodyPr anchor="ctr"/>
+          <a:lstStyle/>
+          <a:p>
+            <a:pPr algn="ctr"/>
+            <a:r>
+              <a:rPr lang="en-US" sz="1100" b="1" dirty="0"/>
+              <a:t>User</a:t>
+            </a:r>
+            <a:endParaRPr lang="en-ID" sz="1100" b="1" dirty="0"/>
+          </a:p>
+        </p:txBody>
+      </p:sp>
+      <p:sp>
+        <p:nvSpPr>
+          <p:cNvPr id="73" name="Shape 6">
+            <a:extLst>
+              <a:ext uri="{FF2B5EF4-FFF2-40B4-BE49-F238E27FC236}">
+                <a16:creationId xmlns:a16="http://schemas.microsoft.com/office/drawing/2014/main" id="{B98A77A2-4772-A6D5-8637-D33FF7756C26}"/>
+              </a:ext>
+            </a:extLst>
+          </p:cNvPr>
+          <p:cNvSpPr/>
+          <p:nvPr/>
+        </p:nvSpPr>
+        <p:spPr>
+          <a:xfrm rot="16200000">
+            <a:off x="-491359" y="3874787"/>
+            <a:ext cx="1787748" cy="384048"/>
+          </a:xfrm>
+          <a:prstGeom prst="roundRect">
+            <a:avLst>
+              <a:gd name="adj" fmla="val 14286"/>
+            </a:avLst>
+          </a:prstGeom>
+          <a:noFill/>
+          <a:ln w="19050">
+            <a:noFill/>
+            <a:prstDash val="solid"/>
+          </a:ln>
+          <a:effectLst>
+            <a:outerShdw blurRad="63500" dist="19050" dir="5400000" algn="bl" rotWithShape="0">
+              <a:srgbClr val="000000">
+                <a:alpha val="10000"/>
+              </a:srgbClr>
+            </a:outerShdw>
+          </a:effectLst>
+        </p:spPr>
+        <p:txBody>
+          <a:bodyPr anchor="ctr"/>
+          <a:lstStyle/>
+          <a:p>
+            <a:pPr algn="ctr"/>
+            <a:r>
+              <a:rPr lang="en-US" sz="1100" b="1" dirty="0"/>
+              <a:t>System</a:t>
+            </a:r>
+            <a:endParaRPr lang="en-ID" sz="1100" b="1" dirty="0"/>
+          </a:p>
+        </p:txBody>
+      </p:sp>
+      <p:sp>
+        <p:nvSpPr>
+          <p:cNvPr id="75" name="Shape 5">
+            <a:extLst>
+              <a:ext uri="{FF2B5EF4-FFF2-40B4-BE49-F238E27FC236}">
+                <a16:creationId xmlns:a16="http://schemas.microsoft.com/office/drawing/2014/main" id="{A5D2EFE4-9E73-C18B-7F19-CE62039BA667}"/>
+              </a:ext>
+            </a:extLst>
+          </p:cNvPr>
+          <p:cNvSpPr/>
+          <p:nvPr/>
+        </p:nvSpPr>
+        <p:spPr>
+          <a:xfrm>
+            <a:off x="163808" y="1749508"/>
+            <a:ext cx="11837534" cy="4918628"/>
+          </a:xfrm>
+          <a:prstGeom prst="roundRect">
+            <a:avLst>
+              <a:gd name="adj" fmla="val 1094"/>
+            </a:avLst>
+          </a:prstGeom>
+          <a:noFill/>
+          <a:ln w="12700">
+            <a:solidFill>
+              <a:srgbClr val="C5D5EA"/>
+            </a:solidFill>
+            <a:prstDash val="solid"/>
+          </a:ln>
+          <a:effectLst>
+            <a:outerShdw blurRad="63500" dist="19050" dir="5400000" algn="bl" rotWithShape="0">
+              <a:srgbClr val="000000">
+                <a:alpha val="10000"/>
+              </a:srgbClr>
+            </a:outerShdw>
+          </a:effectLst>
+        </p:spPr>
+        <p:txBody>
+          <a:bodyPr/>
+          <a:lstStyle/>
+          <a:p>
+            <a:endParaRPr lang="en-US" dirty="0"/>
+          </a:p>
+        </p:txBody>
+      </p:sp>
+      <p:sp>
+        <p:nvSpPr>
+          <p:cNvPr id="12" name="Shape 6">
+            <a:extLst>
+              <a:ext uri="{FF2B5EF4-FFF2-40B4-BE49-F238E27FC236}">
+                <a16:creationId xmlns:a16="http://schemas.microsoft.com/office/drawing/2014/main" id="{45F8A5E3-EAF9-E6CE-7D3A-7B4EF33538A2}"/>
+              </a:ext>
+            </a:extLst>
+          </p:cNvPr>
+          <p:cNvSpPr/>
+          <p:nvPr/>
+        </p:nvSpPr>
+        <p:spPr>
+          <a:xfrm>
+            <a:off x="1944225" y="1199475"/>
+            <a:ext cx="794790" cy="219351"/>
+          </a:xfrm>
+          <a:prstGeom prst="flowChartDocument">
+            <a:avLst/>
+          </a:prstGeom>
+          <a:solidFill>
+            <a:srgbClr val="FFFFFF"/>
+          </a:solidFill>
+          <a:ln w="9525">
+            <a:solidFill>
+              <a:srgbClr val="1B3A6B"/>
+            </a:solidFill>
+            <a:prstDash val="solid"/>
+          </a:ln>
+          <a:effectLst>
+            <a:outerShdw blurRad="63500" dist="19050" dir="5400000" algn="bl" rotWithShape="0">
+              <a:srgbClr val="000000">
+                <a:alpha val="10000"/>
+              </a:srgbClr>
+            </a:outerShdw>
+          </a:effectLst>
+        </p:spPr>
+        <p:txBody>
+          <a:bodyPr anchor="ctr"/>
+          <a:lstStyle/>
+          <a:p>
+            <a:pPr algn="ctr"/>
+            <a:r>
+              <a:rPr lang="en-US" sz="700" dirty="0"/>
+              <a:t>Progress Lane </a:t>
+            </a:r>
+            <a:r>
+              <a:rPr lang="en-US" sz="700" dirty="0" err="1"/>
+              <a:t>Containe</a:t>
+            </a:r>
+            <a:endParaRPr lang="en-ID" sz="700" dirty="0"/>
+          </a:p>
+        </p:txBody>
+      </p:sp>
+      <p:pic>
+        <p:nvPicPr>
+          <p:cNvPr id="21" name="Picture 20">
+            <a:extLst>
+              <a:ext uri="{FF2B5EF4-FFF2-40B4-BE49-F238E27FC236}">
+                <a16:creationId xmlns:a16="http://schemas.microsoft.com/office/drawing/2014/main" id="{74E772BB-6B42-8915-A5E5-C59CE00550AC}"/>
+              </a:ext>
+            </a:extLst>
+          </p:cNvPr>
+          <p:cNvPicPr>
+            <a:picLocks noChangeAspect="1"/>
+          </p:cNvPicPr>
+          <p:nvPr/>
+        </p:nvPicPr>
+        <p:blipFill>
+          <a:blip r:embed="rId3"/>
+          <a:stretch>
+            <a:fillRect/>
+          </a:stretch>
+        </p:blipFill>
+        <p:spPr>
+          <a:xfrm>
+            <a:off x="2535029" y="1244299"/>
+            <a:ext cx="344607" cy="344607"/>
+          </a:xfrm>
+          <a:prstGeom prst="rect">
+            <a:avLst/>
+          </a:prstGeom>
+        </p:spPr>
+      </p:pic>
+      <p:cxnSp>
+        <p:nvCxnSpPr>
+          <p:cNvPr id="22" name="Straight Arrow Connector 21">
+            <a:extLst>
+              <a:ext uri="{FF2B5EF4-FFF2-40B4-BE49-F238E27FC236}">
+                <a16:creationId xmlns:a16="http://schemas.microsoft.com/office/drawing/2014/main" id="{F10B0BE2-7BDB-1C10-E0BF-F67FC77EAD3C}"/>
+              </a:ext>
+            </a:extLst>
+          </p:cNvPr>
+          <p:cNvCxnSpPr>
+            <a:cxnSpLocks/>
+            <a:stCxn id="32" idx="2"/>
+          </p:cNvCxnSpPr>
+          <p:nvPr/>
+        </p:nvCxnSpPr>
+        <p:spPr>
+          <a:xfrm>
+            <a:off x="1798095" y="1173078"/>
+            <a:ext cx="5509" cy="649337"/>
+          </a:xfrm>
+          <a:prstGeom prst="straightConnector1">
+            <a:avLst/>
+          </a:prstGeom>
+          <a:ln>
+            <a:tailEnd type="triangle"/>
+          </a:ln>
+        </p:spPr>
+        <p:style>
+          <a:lnRef idx="2">
+            <a:schemeClr val="accent1"/>
+          </a:lnRef>
+          <a:fillRef idx="0">
+            <a:schemeClr val="accent1"/>
+          </a:fillRef>
+          <a:effectRef idx="1">
+            <a:schemeClr val="accent1"/>
+          </a:effectRef>
+          <a:fontRef idx="minor">
+            <a:schemeClr val="tx1"/>
+          </a:fontRef>
+        </p:style>
+      </p:cxnSp>
+      <p:sp>
+        <p:nvSpPr>
+          <p:cNvPr id="23" name="Flowchart: Magnetic Disk 22">
+            <a:extLst>
+              <a:ext uri="{FF2B5EF4-FFF2-40B4-BE49-F238E27FC236}">
+                <a16:creationId xmlns:a16="http://schemas.microsoft.com/office/drawing/2014/main" id="{3B70B5CC-AD36-8D4C-73F0-3CC0B84CF805}"/>
+              </a:ext>
+            </a:extLst>
+          </p:cNvPr>
+          <p:cNvSpPr/>
+          <p:nvPr/>
+        </p:nvSpPr>
+        <p:spPr>
+          <a:xfrm>
+            <a:off x="1353596" y="2730017"/>
+            <a:ext cx="895324" cy="250961"/>
+          </a:xfrm>
+          <a:prstGeom prst="flowChartMagneticDisk">
+            <a:avLst/>
+          </a:prstGeom>
+        </p:spPr>
+        <p:style>
+          <a:lnRef idx="2">
+            <a:schemeClr val="accent1">
+              <a:shade val="15000"/>
+            </a:schemeClr>
+          </a:lnRef>
+          <a:fillRef idx="1">
+            <a:schemeClr val="accent1"/>
+          </a:fillRef>
+          <a:effectRef idx="0">
+            <a:schemeClr val="accent1"/>
+          </a:effectRef>
+          <a:fontRef idx="minor">
+            <a:schemeClr val="lt1"/>
+          </a:fontRef>
+        </p:style>
+        <p:txBody>
+          <a:bodyPr rtlCol="0" anchor="ctr"/>
+          <a:lstStyle/>
+          <a:p>
+            <a:pPr algn="ctr"/>
+            <a:endParaRPr lang="en-ID"/>
+          </a:p>
+        </p:txBody>
+      </p:sp>
+      <p:sp>
+        <p:nvSpPr>
+          <p:cNvPr id="24" name="Shape 6">
+            <a:extLst>
+              <a:ext uri="{FF2B5EF4-FFF2-40B4-BE49-F238E27FC236}">
+                <a16:creationId xmlns:a16="http://schemas.microsoft.com/office/drawing/2014/main" id="{355D6B02-40A5-A53E-D3E9-BA8D68B9859B}"/>
+              </a:ext>
+            </a:extLst>
+          </p:cNvPr>
+          <p:cNvSpPr/>
+          <p:nvPr/>
+        </p:nvSpPr>
+        <p:spPr>
+          <a:xfrm>
+            <a:off x="1269335" y="1822415"/>
+            <a:ext cx="1063847" cy="243895"/>
+          </a:xfrm>
+          <a:prstGeom prst="roundRect">
+            <a:avLst>
+              <a:gd name="adj" fmla="val 14286"/>
+            </a:avLst>
+          </a:prstGeom>
+          <a:solidFill>
+            <a:srgbClr val="FFFFFF"/>
+          </a:solidFill>
+          <a:ln w="9525">
+            <a:solidFill>
+              <a:srgbClr val="1B3A6B"/>
+            </a:solidFill>
+            <a:prstDash val="solid"/>
+          </a:ln>
+          <a:effectLst>
+            <a:outerShdw blurRad="63500" dist="19050" dir="5400000" algn="bl" rotWithShape="0">
+              <a:srgbClr val="000000">
+                <a:alpha val="10000"/>
+              </a:srgbClr>
+            </a:outerShdw>
+          </a:effectLst>
+        </p:spPr>
+        <p:txBody>
+          <a:bodyPr anchor="ctr"/>
+          <a:lstStyle/>
+          <a:p>
+            <a:pPr algn="ctr"/>
+            <a:r>
+              <a:rPr lang="en-US" sz="800" dirty="0"/>
+              <a:t>Filter Data 43</a:t>
+            </a:r>
+            <a:endParaRPr lang="en-ID" sz="800" dirty="0"/>
+          </a:p>
+        </p:txBody>
+      </p:sp>
+      <p:cxnSp>
+        <p:nvCxnSpPr>
+          <p:cNvPr id="25" name="Straight Arrow Connector 24">
+            <a:extLst>
+              <a:ext uri="{FF2B5EF4-FFF2-40B4-BE49-F238E27FC236}">
+                <a16:creationId xmlns:a16="http://schemas.microsoft.com/office/drawing/2014/main" id="{FEC482AB-0FC8-4BE3-2508-73122D79B2E9}"/>
+              </a:ext>
+            </a:extLst>
+          </p:cNvPr>
+          <p:cNvCxnSpPr>
+            <a:cxnSpLocks/>
+          </p:cNvCxnSpPr>
+          <p:nvPr/>
+        </p:nvCxnSpPr>
+        <p:spPr>
+          <a:xfrm>
+            <a:off x="1798095" y="3508996"/>
+            <a:ext cx="3163" cy="179741"/>
+          </a:xfrm>
+          <a:prstGeom prst="straightConnector1">
+            <a:avLst/>
+          </a:prstGeom>
+          <a:ln>
+            <a:tailEnd type="triangle"/>
+          </a:ln>
+        </p:spPr>
+        <p:style>
+          <a:lnRef idx="2">
+            <a:schemeClr val="accent1"/>
+          </a:lnRef>
+          <a:fillRef idx="0">
+            <a:schemeClr val="accent1"/>
+          </a:fillRef>
+          <a:effectRef idx="1">
+            <a:schemeClr val="accent1"/>
+          </a:effectRef>
+          <a:fontRef idx="minor">
+            <a:schemeClr val="tx1"/>
+          </a:fontRef>
+        </p:style>
+      </p:cxnSp>
+      <p:sp>
+        <p:nvSpPr>
+          <p:cNvPr id="28" name="Shape 6">
+            <a:extLst>
+              <a:ext uri="{FF2B5EF4-FFF2-40B4-BE49-F238E27FC236}">
+                <a16:creationId xmlns:a16="http://schemas.microsoft.com/office/drawing/2014/main" id="{64F6120B-2991-1913-3ADD-E71A31F03A65}"/>
+              </a:ext>
+            </a:extLst>
+          </p:cNvPr>
+          <p:cNvSpPr/>
+          <p:nvPr/>
+        </p:nvSpPr>
+        <p:spPr>
+          <a:xfrm>
+            <a:off x="1143064" y="3010539"/>
+            <a:ext cx="1316389" cy="182818"/>
+          </a:xfrm>
+          <a:prstGeom prst="roundRect">
+            <a:avLst>
+              <a:gd name="adj" fmla="val 14286"/>
+            </a:avLst>
+          </a:prstGeom>
+          <a:noFill/>
+          <a:ln w="19050">
+            <a:noFill/>
+            <a:prstDash val="solid"/>
+          </a:ln>
+          <a:effectLst>
+            <a:outerShdw blurRad="63500" dist="19050" dir="5400000" algn="bl" rotWithShape="0">
+              <a:srgbClr val="000000">
+                <a:alpha val="10000"/>
+              </a:srgbClr>
+            </a:outerShdw>
+          </a:effectLst>
+        </p:spPr>
+        <p:txBody>
+          <a:bodyPr anchor="ctr"/>
+          <a:lstStyle/>
+          <a:p>
+            <a:pPr algn="ctr"/>
+            <a:r>
+              <a:rPr lang="en-US" sz="1100" dirty="0">
+                <a:solidFill>
+                  <a:schemeClr val="tx2">
+                    <a:lumMod val="90000"/>
+                    <a:lumOff val="10000"/>
+                  </a:schemeClr>
+                </a:solidFill>
+              </a:rPr>
+              <a:t>DB Progress Lane</a:t>
+            </a:r>
+            <a:endParaRPr lang="en-ID" sz="1100" dirty="0">
+              <a:solidFill>
+                <a:schemeClr val="tx2">
+                  <a:lumMod val="90000"/>
+                  <a:lumOff val="10000"/>
+                </a:schemeClr>
+              </a:solidFill>
+            </a:endParaRPr>
+          </a:p>
+        </p:txBody>
+      </p:sp>
+      <p:cxnSp>
+        <p:nvCxnSpPr>
+          <p:cNvPr id="29" name="Straight Arrow Connector 28">
+            <a:extLst>
+              <a:ext uri="{FF2B5EF4-FFF2-40B4-BE49-F238E27FC236}">
+                <a16:creationId xmlns:a16="http://schemas.microsoft.com/office/drawing/2014/main" id="{2F86026E-1AC2-2F14-3CC0-195A5A180487}"/>
+              </a:ext>
+            </a:extLst>
+          </p:cNvPr>
+          <p:cNvCxnSpPr>
+            <a:cxnSpLocks/>
+          </p:cNvCxnSpPr>
+          <p:nvPr/>
+        </p:nvCxnSpPr>
+        <p:spPr>
+          <a:xfrm flipH="1">
+            <a:off x="1790055" y="2066310"/>
+            <a:ext cx="1" cy="163377"/>
+          </a:xfrm>
+          <a:prstGeom prst="straightConnector1">
+            <a:avLst/>
+          </a:prstGeom>
+          <a:ln>
+            <a:tailEnd type="triangle"/>
+          </a:ln>
+        </p:spPr>
+        <p:style>
+          <a:lnRef idx="2">
+            <a:schemeClr val="accent1"/>
+          </a:lnRef>
+          <a:fillRef idx="0">
+            <a:schemeClr val="accent1"/>
+          </a:fillRef>
+          <a:effectRef idx="1">
+            <a:schemeClr val="accent1"/>
+          </a:effectRef>
+          <a:fontRef idx="minor">
+            <a:schemeClr val="tx1"/>
+          </a:fontRef>
+        </p:style>
+      </p:cxnSp>
+      <p:sp>
+        <p:nvSpPr>
+          <p:cNvPr id="32" name="Shape 6">
+            <a:extLst>
+              <a:ext uri="{FF2B5EF4-FFF2-40B4-BE49-F238E27FC236}">
+                <a16:creationId xmlns:a16="http://schemas.microsoft.com/office/drawing/2014/main" id="{50C3E9F9-0118-0D4C-3B99-7392B97D74F0}"/>
+              </a:ext>
+            </a:extLst>
+          </p:cNvPr>
+          <p:cNvSpPr/>
+          <p:nvPr/>
+        </p:nvSpPr>
+        <p:spPr>
+          <a:xfrm>
+            <a:off x="1266171" y="929183"/>
+            <a:ext cx="1063847" cy="243895"/>
+          </a:xfrm>
+          <a:prstGeom prst="roundRect">
+            <a:avLst>
+              <a:gd name="adj" fmla="val 14286"/>
+            </a:avLst>
+          </a:prstGeom>
+          <a:solidFill>
+            <a:srgbClr val="FFFFFF"/>
+          </a:solidFill>
+          <a:ln w="9525">
+            <a:solidFill>
+              <a:srgbClr val="1B3A6B"/>
+            </a:solidFill>
+            <a:prstDash val="solid"/>
+          </a:ln>
+          <a:effectLst>
+            <a:outerShdw blurRad="63500" dist="19050" dir="5400000" algn="bl" rotWithShape="0">
+              <a:srgbClr val="000000">
+                <a:alpha val="10000"/>
+              </a:srgbClr>
+            </a:outerShdw>
+          </a:effectLst>
+        </p:spPr>
+        <p:txBody>
+          <a:bodyPr anchor="ctr"/>
+          <a:lstStyle/>
+          <a:p>
+            <a:pPr algn="ctr"/>
+            <a:r>
+              <a:rPr lang="en-US" sz="800" dirty="0"/>
+              <a:t>Upload Progress Lane </a:t>
+            </a:r>
+            <a:endParaRPr lang="en-ID" sz="800" dirty="0"/>
+          </a:p>
+        </p:txBody>
+      </p:sp>
+      <p:sp>
+        <p:nvSpPr>
+          <p:cNvPr id="33" name="Shape 6">
+            <a:extLst>
+              <a:ext uri="{FF2B5EF4-FFF2-40B4-BE49-F238E27FC236}">
+                <a16:creationId xmlns:a16="http://schemas.microsoft.com/office/drawing/2014/main" id="{79F5DFA0-9E68-B505-D972-0D8CB07AFDB6}"/>
+              </a:ext>
+            </a:extLst>
+          </p:cNvPr>
+          <p:cNvSpPr/>
+          <p:nvPr/>
+        </p:nvSpPr>
+        <p:spPr>
+          <a:xfrm>
+            <a:off x="1266171" y="2242227"/>
+            <a:ext cx="1063847" cy="243895"/>
+          </a:xfrm>
+          <a:prstGeom prst="roundRect">
+            <a:avLst>
+              <a:gd name="adj" fmla="val 14286"/>
+            </a:avLst>
+          </a:prstGeom>
+          <a:solidFill>
+            <a:srgbClr val="FFFFFF"/>
+          </a:solidFill>
+          <a:ln w="9525">
+            <a:solidFill>
+              <a:srgbClr val="1B3A6B"/>
+            </a:solidFill>
+            <a:prstDash val="solid"/>
+          </a:ln>
+          <a:effectLst>
+            <a:outerShdw blurRad="63500" dist="19050" dir="5400000" algn="bl" rotWithShape="0">
+              <a:srgbClr val="000000">
+                <a:alpha val="10000"/>
+              </a:srgbClr>
+            </a:outerShdw>
+          </a:effectLst>
+        </p:spPr>
+        <p:txBody>
+          <a:bodyPr anchor="ctr"/>
+          <a:lstStyle/>
+          <a:p>
+            <a:pPr algn="ctr"/>
+            <a:r>
+              <a:rPr lang="en-ID" sz="800" dirty="0"/>
+              <a:t>Write</a:t>
+            </a:r>
+          </a:p>
+        </p:txBody>
+      </p:sp>
+      <p:cxnSp>
+        <p:nvCxnSpPr>
+          <p:cNvPr id="35" name="Straight Arrow Connector 34">
+            <a:extLst>
+              <a:ext uri="{FF2B5EF4-FFF2-40B4-BE49-F238E27FC236}">
+                <a16:creationId xmlns:a16="http://schemas.microsoft.com/office/drawing/2014/main" id="{55092744-B2BA-8C54-A624-1B21D4BE4857}"/>
+              </a:ext>
+            </a:extLst>
+          </p:cNvPr>
+          <p:cNvCxnSpPr>
+            <a:cxnSpLocks/>
+            <a:stCxn id="33" idx="2"/>
+            <a:endCxn id="23" idx="1"/>
+          </p:cNvCxnSpPr>
+          <p:nvPr/>
+        </p:nvCxnSpPr>
+        <p:spPr>
+          <a:xfrm>
+            <a:off x="1798095" y="2486122"/>
+            <a:ext cx="3163" cy="243895"/>
+          </a:xfrm>
+          <a:prstGeom prst="straightConnector1">
+            <a:avLst/>
+          </a:prstGeom>
+          <a:ln>
+            <a:tailEnd type="triangle"/>
+          </a:ln>
+        </p:spPr>
+        <p:style>
+          <a:lnRef idx="2">
+            <a:schemeClr val="accent1"/>
+          </a:lnRef>
+          <a:fillRef idx="0">
+            <a:schemeClr val="accent1"/>
+          </a:fillRef>
+          <a:effectRef idx="1">
+            <a:schemeClr val="accent1"/>
+          </a:effectRef>
+          <a:fontRef idx="minor">
+            <a:schemeClr val="tx1"/>
+          </a:fontRef>
+        </p:style>
+      </p:cxnSp>
+      <p:sp>
+        <p:nvSpPr>
+          <p:cNvPr id="36" name="Shape 6">
+            <a:extLst>
+              <a:ext uri="{FF2B5EF4-FFF2-40B4-BE49-F238E27FC236}">
+                <a16:creationId xmlns:a16="http://schemas.microsoft.com/office/drawing/2014/main" id="{6C746E30-AC37-21CB-8D00-76B5259DB891}"/>
+              </a:ext>
+            </a:extLst>
+          </p:cNvPr>
+          <p:cNvSpPr/>
+          <p:nvPr/>
+        </p:nvSpPr>
+        <p:spPr>
+          <a:xfrm>
+            <a:off x="1272445" y="3317987"/>
+            <a:ext cx="1063847" cy="243895"/>
+          </a:xfrm>
+          <a:prstGeom prst="roundRect">
+            <a:avLst>
+              <a:gd name="adj" fmla="val 14286"/>
+            </a:avLst>
+          </a:prstGeom>
+          <a:solidFill>
+            <a:srgbClr val="FFFFFF"/>
+          </a:solidFill>
+          <a:ln w="9525">
+            <a:solidFill>
+              <a:srgbClr val="1B3A6B"/>
+            </a:solidFill>
+            <a:prstDash val="solid"/>
+          </a:ln>
+          <a:effectLst>
+            <a:outerShdw blurRad="63500" dist="19050" dir="5400000" algn="bl" rotWithShape="0">
+              <a:srgbClr val="000000">
+                <a:alpha val="10000"/>
+              </a:srgbClr>
+            </a:outerShdw>
+          </a:effectLst>
+        </p:spPr>
+        <p:txBody>
+          <a:bodyPr anchor="ctr"/>
+          <a:lstStyle/>
+          <a:p>
+            <a:pPr algn="ctr"/>
+            <a:r>
+              <a:rPr lang="en-ID" sz="800" dirty="0"/>
+              <a:t>Read</a:t>
+            </a:r>
+          </a:p>
+        </p:txBody>
+      </p:sp>
+      <p:cxnSp>
+        <p:nvCxnSpPr>
+          <p:cNvPr id="37" name="Straight Arrow Connector 36">
+            <a:extLst>
+              <a:ext uri="{FF2B5EF4-FFF2-40B4-BE49-F238E27FC236}">
+                <a16:creationId xmlns:a16="http://schemas.microsoft.com/office/drawing/2014/main" id="{52FDDA9F-5FE7-98B0-9727-FAE7F64C1618}"/>
+              </a:ext>
+            </a:extLst>
+          </p:cNvPr>
+          <p:cNvCxnSpPr>
+            <a:cxnSpLocks/>
+            <a:stCxn id="28" idx="2"/>
+            <a:endCxn id="36" idx="0"/>
+          </p:cNvCxnSpPr>
+          <p:nvPr/>
+        </p:nvCxnSpPr>
+        <p:spPr>
+          <a:xfrm>
+            <a:off x="1801259" y="3193357"/>
+            <a:ext cx="3110" cy="124630"/>
+          </a:xfrm>
+          <a:prstGeom prst="straightConnector1">
+            <a:avLst/>
+          </a:prstGeom>
+          <a:ln>
+            <a:tailEnd type="triangle"/>
+          </a:ln>
+        </p:spPr>
+        <p:style>
+          <a:lnRef idx="2">
+            <a:schemeClr val="accent1"/>
+          </a:lnRef>
+          <a:fillRef idx="0">
+            <a:schemeClr val="accent1"/>
+          </a:fillRef>
+          <a:effectRef idx="1">
+            <a:schemeClr val="accent1"/>
+          </a:effectRef>
+          <a:fontRef idx="minor">
+            <a:schemeClr val="tx1"/>
+          </a:fontRef>
+        </p:style>
+      </p:cxnSp>
+      <p:sp>
+        <p:nvSpPr>
+          <p:cNvPr id="38" name="Shape 6">
+            <a:extLst>
+              <a:ext uri="{FF2B5EF4-FFF2-40B4-BE49-F238E27FC236}">
+                <a16:creationId xmlns:a16="http://schemas.microsoft.com/office/drawing/2014/main" id="{22336E1C-CDFA-5DB1-F83D-74BC5462C71C}"/>
+              </a:ext>
+            </a:extLst>
+          </p:cNvPr>
+          <p:cNvSpPr/>
+          <p:nvPr/>
+        </p:nvSpPr>
+        <p:spPr>
+          <a:xfrm>
+            <a:off x="4132786" y="1199475"/>
+            <a:ext cx="794790" cy="219351"/>
+          </a:xfrm>
+          <a:prstGeom prst="flowChartDocument">
+            <a:avLst/>
+          </a:prstGeom>
+          <a:solidFill>
+            <a:srgbClr val="FFFFFF"/>
+          </a:solidFill>
+          <a:ln w="9525">
+            <a:solidFill>
+              <a:srgbClr val="1B3A6B"/>
+            </a:solidFill>
+            <a:prstDash val="solid"/>
+          </a:ln>
+          <a:effectLst>
+            <a:outerShdw blurRad="63500" dist="19050" dir="5400000" algn="bl" rotWithShape="0">
+              <a:srgbClr val="000000">
+                <a:alpha val="10000"/>
+              </a:srgbClr>
+            </a:outerShdw>
+          </a:effectLst>
+        </p:spPr>
+        <p:txBody>
+          <a:bodyPr anchor="ctr"/>
+          <a:lstStyle/>
+          <a:p>
+            <a:pPr algn="ctr"/>
+            <a:r>
+              <a:rPr lang="en-US" sz="700" dirty="0"/>
+              <a:t>Offset Andon</a:t>
+            </a:r>
+            <a:endParaRPr lang="en-ID" sz="700" dirty="0"/>
+          </a:p>
+        </p:txBody>
+      </p:sp>
+      <p:pic>
+        <p:nvPicPr>
+          <p:cNvPr id="39" name="Picture 38">
+            <a:extLst>
+              <a:ext uri="{FF2B5EF4-FFF2-40B4-BE49-F238E27FC236}">
+                <a16:creationId xmlns:a16="http://schemas.microsoft.com/office/drawing/2014/main" id="{546E4424-3F77-EA3F-E37B-9648E088AE5B}"/>
+              </a:ext>
+            </a:extLst>
+          </p:cNvPr>
+          <p:cNvPicPr>
+            <a:picLocks noChangeAspect="1"/>
+          </p:cNvPicPr>
+          <p:nvPr/>
+        </p:nvPicPr>
+        <p:blipFill>
+          <a:blip r:embed="rId3"/>
+          <a:stretch>
+            <a:fillRect/>
+          </a:stretch>
+        </p:blipFill>
+        <p:spPr>
+          <a:xfrm>
+            <a:off x="4723590" y="1244299"/>
+            <a:ext cx="344607" cy="344607"/>
+          </a:xfrm>
+          <a:prstGeom prst="rect">
+            <a:avLst/>
+          </a:prstGeom>
+        </p:spPr>
+      </p:pic>
+      <p:cxnSp>
+        <p:nvCxnSpPr>
+          <p:cNvPr id="41" name="Straight Arrow Connector 40">
+            <a:extLst>
+              <a:ext uri="{FF2B5EF4-FFF2-40B4-BE49-F238E27FC236}">
+                <a16:creationId xmlns:a16="http://schemas.microsoft.com/office/drawing/2014/main" id="{4F3C35E1-F407-E091-A118-8B854B979F89}"/>
+              </a:ext>
+            </a:extLst>
+          </p:cNvPr>
+          <p:cNvCxnSpPr>
+            <a:cxnSpLocks/>
+            <a:stCxn id="50" idx="2"/>
+          </p:cNvCxnSpPr>
+          <p:nvPr/>
+        </p:nvCxnSpPr>
+        <p:spPr>
+          <a:xfrm>
+            <a:off x="3986656" y="1173078"/>
+            <a:ext cx="5509" cy="649337"/>
+          </a:xfrm>
+          <a:prstGeom prst="straightConnector1">
+            <a:avLst/>
+          </a:prstGeom>
+          <a:ln>
+            <a:tailEnd type="triangle"/>
+          </a:ln>
+        </p:spPr>
+        <p:style>
+          <a:lnRef idx="2">
+            <a:schemeClr val="accent1"/>
+          </a:lnRef>
+          <a:fillRef idx="0">
+            <a:schemeClr val="accent1"/>
+          </a:fillRef>
+          <a:effectRef idx="1">
+            <a:schemeClr val="accent1"/>
+          </a:effectRef>
+          <a:fontRef idx="minor">
+            <a:schemeClr val="tx1"/>
+          </a:fontRef>
+        </p:style>
+      </p:cxnSp>
+      <p:sp>
+        <p:nvSpPr>
+          <p:cNvPr id="42" name="Flowchart: Magnetic Disk 41">
+            <a:extLst>
+              <a:ext uri="{FF2B5EF4-FFF2-40B4-BE49-F238E27FC236}">
+                <a16:creationId xmlns:a16="http://schemas.microsoft.com/office/drawing/2014/main" id="{D119471C-BE25-731C-155A-CDEC94C8AFB3}"/>
+              </a:ext>
+            </a:extLst>
+          </p:cNvPr>
+          <p:cNvSpPr/>
+          <p:nvPr/>
+        </p:nvSpPr>
+        <p:spPr>
+          <a:xfrm>
+            <a:off x="3542157" y="2730017"/>
+            <a:ext cx="895324" cy="250961"/>
+          </a:xfrm>
+          <a:prstGeom prst="flowChartMagneticDisk">
+            <a:avLst/>
+          </a:prstGeom>
+        </p:spPr>
+        <p:style>
+          <a:lnRef idx="2">
+            <a:schemeClr val="accent1">
+              <a:shade val="15000"/>
+            </a:schemeClr>
+          </a:lnRef>
+          <a:fillRef idx="1">
+            <a:schemeClr val="accent1"/>
+          </a:fillRef>
+          <a:effectRef idx="0">
+            <a:schemeClr val="accent1"/>
+          </a:effectRef>
+          <a:fontRef idx="minor">
+            <a:schemeClr val="lt1"/>
+          </a:fontRef>
+        </p:style>
+        <p:txBody>
+          <a:bodyPr rtlCol="0" anchor="ctr"/>
+          <a:lstStyle/>
+          <a:p>
+            <a:pPr algn="ctr"/>
+            <a:endParaRPr lang="en-ID"/>
+          </a:p>
+        </p:txBody>
+      </p:sp>
+      <p:sp>
+        <p:nvSpPr>
+          <p:cNvPr id="45" name="Shape 6">
+            <a:extLst>
+              <a:ext uri="{FF2B5EF4-FFF2-40B4-BE49-F238E27FC236}">
+                <a16:creationId xmlns:a16="http://schemas.microsoft.com/office/drawing/2014/main" id="{A2D7C4D7-9883-7568-436E-4C2E0B081DCB}"/>
+              </a:ext>
+            </a:extLst>
+          </p:cNvPr>
+          <p:cNvSpPr/>
+          <p:nvPr/>
+        </p:nvSpPr>
+        <p:spPr>
+          <a:xfrm>
+            <a:off x="3457896" y="1822415"/>
+            <a:ext cx="1063847" cy="243895"/>
+          </a:xfrm>
+          <a:prstGeom prst="roundRect">
+            <a:avLst>
+              <a:gd name="adj" fmla="val 14286"/>
+            </a:avLst>
+          </a:prstGeom>
+          <a:solidFill>
+            <a:srgbClr val="FFFFFF"/>
+          </a:solidFill>
+          <a:ln w="9525">
+            <a:solidFill>
+              <a:srgbClr val="1B3A6B"/>
+            </a:solidFill>
+            <a:prstDash val="solid"/>
+          </a:ln>
+          <a:effectLst>
+            <a:outerShdw blurRad="63500" dist="19050" dir="5400000" algn="bl" rotWithShape="0">
+              <a:srgbClr val="000000">
+                <a:alpha val="10000"/>
+              </a:srgbClr>
+            </a:outerShdw>
+          </a:effectLst>
+        </p:spPr>
+        <p:txBody>
+          <a:bodyPr anchor="ctr"/>
+          <a:lstStyle/>
+          <a:p>
+            <a:pPr algn="ctr"/>
+            <a:r>
+              <a:rPr lang="en-US" sz="800" dirty="0"/>
+              <a:t>Filter Data 43</a:t>
+            </a:r>
+            <a:endParaRPr lang="en-ID" sz="800" dirty="0"/>
+          </a:p>
+        </p:txBody>
+      </p:sp>
+      <p:cxnSp>
+        <p:nvCxnSpPr>
+          <p:cNvPr id="46" name="Straight Arrow Connector 45">
+            <a:extLst>
+              <a:ext uri="{FF2B5EF4-FFF2-40B4-BE49-F238E27FC236}">
+                <a16:creationId xmlns:a16="http://schemas.microsoft.com/office/drawing/2014/main" id="{960D817C-88D4-04A1-7CEC-12095E512F85}"/>
+              </a:ext>
+            </a:extLst>
+          </p:cNvPr>
+          <p:cNvCxnSpPr>
+            <a:cxnSpLocks/>
+          </p:cNvCxnSpPr>
+          <p:nvPr/>
+        </p:nvCxnSpPr>
+        <p:spPr>
+          <a:xfrm>
+            <a:off x="3986656" y="3508996"/>
+            <a:ext cx="3163" cy="179741"/>
+          </a:xfrm>
+          <a:prstGeom prst="straightConnector1">
+            <a:avLst/>
+          </a:prstGeom>
+          <a:ln>
+            <a:tailEnd type="triangle"/>
+          </a:ln>
+        </p:spPr>
+        <p:style>
+          <a:lnRef idx="2">
+            <a:schemeClr val="accent1"/>
+          </a:lnRef>
+          <a:fillRef idx="0">
+            <a:schemeClr val="accent1"/>
+          </a:fillRef>
+          <a:effectRef idx="1">
+            <a:schemeClr val="accent1"/>
+          </a:effectRef>
+          <a:fontRef idx="minor">
+            <a:schemeClr val="tx1"/>
+          </a:fontRef>
+        </p:style>
+      </p:cxnSp>
+      <p:sp>
+        <p:nvSpPr>
+          <p:cNvPr id="47" name="Shape 6">
+            <a:extLst>
+              <a:ext uri="{FF2B5EF4-FFF2-40B4-BE49-F238E27FC236}">
+                <a16:creationId xmlns:a16="http://schemas.microsoft.com/office/drawing/2014/main" id="{4F122702-4337-10DE-358D-625676D9B078}"/>
+              </a:ext>
+            </a:extLst>
+          </p:cNvPr>
+          <p:cNvSpPr/>
+          <p:nvPr/>
+        </p:nvSpPr>
+        <p:spPr>
+          <a:xfrm>
+            <a:off x="3331625" y="3010539"/>
+            <a:ext cx="1316389" cy="182818"/>
+          </a:xfrm>
+          <a:prstGeom prst="roundRect">
+            <a:avLst>
+              <a:gd name="adj" fmla="val 14286"/>
+            </a:avLst>
+          </a:prstGeom>
+          <a:noFill/>
+          <a:ln w="19050">
+            <a:noFill/>
+            <a:prstDash val="solid"/>
+          </a:ln>
+          <a:effectLst>
+            <a:outerShdw blurRad="63500" dist="19050" dir="5400000" algn="bl" rotWithShape="0">
+              <a:srgbClr val="000000">
+                <a:alpha val="10000"/>
+              </a:srgbClr>
+            </a:outerShdw>
+          </a:effectLst>
+        </p:spPr>
+        <p:txBody>
+          <a:bodyPr anchor="ctr"/>
+          <a:lstStyle/>
+          <a:p>
+            <a:pPr algn="ctr"/>
+            <a:r>
+              <a:rPr lang="en-US" sz="1100" dirty="0">
+                <a:solidFill>
+                  <a:schemeClr val="tx2">
+                    <a:lumMod val="90000"/>
+                    <a:lumOff val="10000"/>
+                  </a:schemeClr>
+                </a:solidFill>
+              </a:rPr>
+              <a:t>DB Progress Lane</a:t>
+            </a:r>
+            <a:endParaRPr lang="en-ID" sz="1100" dirty="0">
+              <a:solidFill>
+                <a:schemeClr val="tx2">
+                  <a:lumMod val="90000"/>
+                  <a:lumOff val="10000"/>
+                </a:schemeClr>
+              </a:solidFill>
+            </a:endParaRPr>
+          </a:p>
+        </p:txBody>
+      </p:sp>
+      <p:cxnSp>
+        <p:nvCxnSpPr>
+          <p:cNvPr id="48" name="Straight Arrow Connector 47">
+            <a:extLst>
+              <a:ext uri="{FF2B5EF4-FFF2-40B4-BE49-F238E27FC236}">
+                <a16:creationId xmlns:a16="http://schemas.microsoft.com/office/drawing/2014/main" id="{2246EF97-7BBE-8DC9-7D27-EEB4B812C922}"/>
+              </a:ext>
+            </a:extLst>
+          </p:cNvPr>
+          <p:cNvCxnSpPr>
+            <a:cxnSpLocks/>
+          </p:cNvCxnSpPr>
+          <p:nvPr/>
+        </p:nvCxnSpPr>
+        <p:spPr>
+          <a:xfrm flipH="1">
+            <a:off x="3978616" y="2066310"/>
+            <a:ext cx="1" cy="163377"/>
+          </a:xfrm>
+          <a:prstGeom prst="straightConnector1">
+            <a:avLst/>
+          </a:prstGeom>
+          <a:ln>
+            <a:tailEnd type="triangle"/>
+          </a:ln>
+        </p:spPr>
+        <p:style>
+          <a:lnRef idx="2">
+            <a:schemeClr val="accent1"/>
+          </a:lnRef>
+          <a:fillRef idx="0">
+            <a:schemeClr val="accent1"/>
+          </a:fillRef>
+          <a:effectRef idx="1">
+            <a:schemeClr val="accent1"/>
+          </a:effectRef>
+          <a:fontRef idx="minor">
+            <a:schemeClr val="tx1"/>
+          </a:fontRef>
+        </p:style>
+      </p:cxnSp>
+      <p:sp>
+        <p:nvSpPr>
+          <p:cNvPr id="50" name="Shape 6">
+            <a:extLst>
+              <a:ext uri="{FF2B5EF4-FFF2-40B4-BE49-F238E27FC236}">
+                <a16:creationId xmlns:a16="http://schemas.microsoft.com/office/drawing/2014/main" id="{8E4C2781-3125-70A0-191B-871CDF0B17FF}"/>
+              </a:ext>
+            </a:extLst>
+          </p:cNvPr>
+          <p:cNvSpPr/>
+          <p:nvPr/>
+        </p:nvSpPr>
+        <p:spPr>
+          <a:xfrm>
+            <a:off x="3454732" y="929183"/>
+            <a:ext cx="1063847" cy="243895"/>
+          </a:xfrm>
+          <a:prstGeom prst="roundRect">
+            <a:avLst>
+              <a:gd name="adj" fmla="val 14286"/>
+            </a:avLst>
+          </a:prstGeom>
+          <a:solidFill>
+            <a:srgbClr val="FFFFFF"/>
+          </a:solidFill>
+          <a:ln w="9525">
+            <a:solidFill>
+              <a:srgbClr val="1B3A6B"/>
+            </a:solidFill>
+            <a:prstDash val="solid"/>
+          </a:ln>
+          <a:effectLst>
+            <a:outerShdw blurRad="63500" dist="19050" dir="5400000" algn="bl" rotWithShape="0">
+              <a:srgbClr val="000000">
+                <a:alpha val="10000"/>
+              </a:srgbClr>
+            </a:outerShdw>
+          </a:effectLst>
+        </p:spPr>
+        <p:txBody>
+          <a:bodyPr anchor="ctr"/>
+          <a:lstStyle/>
+          <a:p>
+            <a:pPr algn="ctr"/>
+            <a:r>
+              <a:rPr lang="en-US" sz="800" dirty="0"/>
+              <a:t>Upload Offset Andon</a:t>
+            </a:r>
+            <a:endParaRPr lang="en-ID" sz="800" dirty="0"/>
+          </a:p>
+        </p:txBody>
+      </p:sp>
+      <p:sp>
+        <p:nvSpPr>
+          <p:cNvPr id="51" name="Shape 6">
+            <a:extLst>
+              <a:ext uri="{FF2B5EF4-FFF2-40B4-BE49-F238E27FC236}">
+                <a16:creationId xmlns:a16="http://schemas.microsoft.com/office/drawing/2014/main" id="{9F1CDB6A-2358-6691-F39D-7F9DAA74966A}"/>
+              </a:ext>
+            </a:extLst>
+          </p:cNvPr>
+          <p:cNvSpPr/>
+          <p:nvPr/>
+        </p:nvSpPr>
+        <p:spPr>
+          <a:xfrm>
+            <a:off x="3454732" y="2242227"/>
+            <a:ext cx="1063847" cy="243895"/>
+          </a:xfrm>
+          <a:prstGeom prst="roundRect">
+            <a:avLst>
+              <a:gd name="adj" fmla="val 14286"/>
+            </a:avLst>
+          </a:prstGeom>
+          <a:solidFill>
+            <a:srgbClr val="FFFFFF"/>
+          </a:solidFill>
+          <a:ln w="9525">
+            <a:solidFill>
+              <a:srgbClr val="1B3A6B"/>
+            </a:solidFill>
+            <a:prstDash val="solid"/>
+          </a:ln>
+          <a:effectLst>
+            <a:outerShdw blurRad="63500" dist="19050" dir="5400000" algn="bl" rotWithShape="0">
+              <a:srgbClr val="000000">
+                <a:alpha val="10000"/>
+              </a:srgbClr>
+            </a:outerShdw>
+          </a:effectLst>
+        </p:spPr>
+        <p:txBody>
+          <a:bodyPr anchor="ctr"/>
+          <a:lstStyle/>
+          <a:p>
+            <a:pPr algn="ctr"/>
+            <a:r>
+              <a:rPr lang="en-ID" sz="800" dirty="0"/>
+              <a:t>Write</a:t>
+            </a:r>
+          </a:p>
+        </p:txBody>
+      </p:sp>
+      <p:cxnSp>
+        <p:nvCxnSpPr>
+          <p:cNvPr id="53" name="Straight Arrow Connector 52">
+            <a:extLst>
+              <a:ext uri="{FF2B5EF4-FFF2-40B4-BE49-F238E27FC236}">
+                <a16:creationId xmlns:a16="http://schemas.microsoft.com/office/drawing/2014/main" id="{6394A08C-22A7-1016-E0FC-277D31CCD9A9}"/>
+              </a:ext>
+            </a:extLst>
+          </p:cNvPr>
+          <p:cNvCxnSpPr>
+            <a:cxnSpLocks/>
+            <a:stCxn id="51" idx="2"/>
+            <a:endCxn id="42" idx="1"/>
+          </p:cNvCxnSpPr>
+          <p:nvPr/>
+        </p:nvCxnSpPr>
+        <p:spPr>
+          <a:xfrm>
+            <a:off x="3986656" y="2486122"/>
+            <a:ext cx="3163" cy="243895"/>
+          </a:xfrm>
+          <a:prstGeom prst="straightConnector1">
+            <a:avLst/>
+          </a:prstGeom>
+          <a:ln>
+            <a:tailEnd type="triangle"/>
+          </a:ln>
+        </p:spPr>
+        <p:style>
+          <a:lnRef idx="2">
+            <a:schemeClr val="accent1"/>
+          </a:lnRef>
+          <a:fillRef idx="0">
+            <a:schemeClr val="accent1"/>
+          </a:fillRef>
+          <a:effectRef idx="1">
+            <a:schemeClr val="accent1"/>
+          </a:effectRef>
+          <a:fontRef idx="minor">
+            <a:schemeClr val="tx1"/>
+          </a:fontRef>
+        </p:style>
+      </p:cxnSp>
+      <p:sp>
+        <p:nvSpPr>
+          <p:cNvPr id="54" name="Shape 6">
+            <a:extLst>
+              <a:ext uri="{FF2B5EF4-FFF2-40B4-BE49-F238E27FC236}">
+                <a16:creationId xmlns:a16="http://schemas.microsoft.com/office/drawing/2014/main" id="{3E2A048C-93C7-1B48-8060-F0548CF8024C}"/>
+              </a:ext>
+            </a:extLst>
+          </p:cNvPr>
+          <p:cNvSpPr/>
+          <p:nvPr/>
+        </p:nvSpPr>
+        <p:spPr>
+          <a:xfrm>
+            <a:off x="3461006" y="3317987"/>
+            <a:ext cx="1063847" cy="243895"/>
+          </a:xfrm>
+          <a:prstGeom prst="roundRect">
+            <a:avLst>
+              <a:gd name="adj" fmla="val 14286"/>
+            </a:avLst>
+          </a:prstGeom>
+          <a:solidFill>
+            <a:srgbClr val="FFFFFF"/>
+          </a:solidFill>
+          <a:ln w="9525">
+            <a:solidFill>
+              <a:srgbClr val="1B3A6B"/>
+            </a:solidFill>
+            <a:prstDash val="solid"/>
+          </a:ln>
+          <a:effectLst>
+            <a:outerShdw blurRad="63500" dist="19050" dir="5400000" algn="bl" rotWithShape="0">
+              <a:srgbClr val="000000">
+                <a:alpha val="10000"/>
+              </a:srgbClr>
+            </a:outerShdw>
+          </a:effectLst>
+        </p:spPr>
+        <p:txBody>
+          <a:bodyPr anchor="ctr"/>
+          <a:lstStyle/>
+          <a:p>
+            <a:pPr algn="ctr"/>
+            <a:r>
+              <a:rPr lang="en-ID" sz="800" dirty="0"/>
+              <a:t>Read</a:t>
+            </a:r>
+          </a:p>
+        </p:txBody>
+      </p:sp>
+      <p:cxnSp>
+        <p:nvCxnSpPr>
+          <p:cNvPr id="60" name="Straight Arrow Connector 59">
+            <a:extLst>
+              <a:ext uri="{FF2B5EF4-FFF2-40B4-BE49-F238E27FC236}">
+                <a16:creationId xmlns:a16="http://schemas.microsoft.com/office/drawing/2014/main" id="{222E3922-7FE2-3CC0-D8A8-511F7C1F3246}"/>
+              </a:ext>
+            </a:extLst>
+          </p:cNvPr>
+          <p:cNvCxnSpPr>
+            <a:cxnSpLocks/>
+            <a:stCxn id="47" idx="2"/>
+            <a:endCxn id="54" idx="0"/>
+          </p:cNvCxnSpPr>
+          <p:nvPr/>
+        </p:nvCxnSpPr>
+        <p:spPr>
+          <a:xfrm>
+            <a:off x="3989820" y="3193357"/>
+            <a:ext cx="3110" cy="124630"/>
+          </a:xfrm>
+          <a:prstGeom prst="straightConnector1">
+            <a:avLst/>
+          </a:prstGeom>
+          <a:ln>
+            <a:tailEnd type="triangle"/>
+          </a:ln>
+        </p:spPr>
+        <p:style>
+          <a:lnRef idx="2">
+            <a:schemeClr val="accent1"/>
+          </a:lnRef>
+          <a:fillRef idx="0">
+            <a:schemeClr val="accent1"/>
+          </a:fillRef>
+          <a:effectRef idx="1">
+            <a:schemeClr val="accent1"/>
+          </a:effectRef>
+          <a:fontRef idx="minor">
+            <a:schemeClr val="tx1"/>
+          </a:fontRef>
+        </p:style>
+      </p:cxnSp>
+      <p:sp>
+        <p:nvSpPr>
+          <p:cNvPr id="62" name="Shape 6">
+            <a:extLst>
+              <a:ext uri="{FF2B5EF4-FFF2-40B4-BE49-F238E27FC236}">
+                <a16:creationId xmlns:a16="http://schemas.microsoft.com/office/drawing/2014/main" id="{227584AB-BE26-EABE-E96F-D1DEFD8EE68B}"/>
+              </a:ext>
+            </a:extLst>
+          </p:cNvPr>
+          <p:cNvSpPr/>
+          <p:nvPr/>
+        </p:nvSpPr>
+        <p:spPr>
+          <a:xfrm>
+            <a:off x="1277773" y="3695781"/>
+            <a:ext cx="1063847" cy="243895"/>
+          </a:xfrm>
+          <a:prstGeom prst="roundRect">
+            <a:avLst>
+              <a:gd name="adj" fmla="val 14286"/>
+            </a:avLst>
+          </a:prstGeom>
+          <a:solidFill>
+            <a:srgbClr val="FFFFFF"/>
+          </a:solidFill>
+          <a:ln w="9525">
+            <a:solidFill>
+              <a:srgbClr val="1B3A6B"/>
+            </a:solidFill>
+            <a:prstDash val="solid"/>
+          </a:ln>
+          <a:effectLst>
+            <a:outerShdw blurRad="63500" dist="19050" dir="5400000" algn="bl" rotWithShape="0">
+              <a:srgbClr val="000000">
+                <a:alpha val="10000"/>
+              </a:srgbClr>
+            </a:outerShdw>
+          </a:effectLst>
+        </p:spPr>
+        <p:txBody>
+          <a:bodyPr anchor="ctr"/>
+          <a:lstStyle/>
+          <a:p>
+            <a:pPr algn="ctr"/>
+            <a:r>
+              <a:rPr lang="en-ID" sz="800" dirty="0" err="1"/>
+              <a:t>Hitung</a:t>
+            </a:r>
+            <a:r>
+              <a:rPr lang="en-ID" sz="800" dirty="0"/>
+              <a:t> </a:t>
+            </a:r>
+            <a:r>
+              <a:rPr lang="en-ID" sz="800" dirty="0" err="1"/>
+              <a:t>waktu</a:t>
+            </a:r>
+            <a:r>
+              <a:rPr lang="en-ID" sz="800" dirty="0"/>
+              <a:t> </a:t>
+            </a:r>
+            <a:r>
+              <a:rPr lang="en-ID" sz="800" dirty="0" err="1"/>
+              <a:t>setiap</a:t>
+            </a:r>
+            <a:r>
+              <a:rPr lang="en-ID" sz="800" dirty="0"/>
+              <a:t> plane</a:t>
+            </a:r>
+          </a:p>
+        </p:txBody>
+      </p:sp>
+      <p:sp>
+        <p:nvSpPr>
+          <p:cNvPr id="63" name="Shape 6">
+            <a:extLst>
+              <a:ext uri="{FF2B5EF4-FFF2-40B4-BE49-F238E27FC236}">
+                <a16:creationId xmlns:a16="http://schemas.microsoft.com/office/drawing/2014/main" id="{9495374C-D459-210D-290E-DCDA99EF4884}"/>
+              </a:ext>
+            </a:extLst>
+          </p:cNvPr>
+          <p:cNvSpPr/>
+          <p:nvPr/>
+        </p:nvSpPr>
+        <p:spPr>
+          <a:xfrm>
+            <a:off x="2244903" y="3304678"/>
+            <a:ext cx="883489" cy="257204"/>
+          </a:xfrm>
+          <a:prstGeom prst="roundRect">
+            <a:avLst>
+              <a:gd name="adj" fmla="val 14286"/>
+            </a:avLst>
+          </a:prstGeom>
+          <a:noFill/>
+          <a:ln w="19050">
+            <a:noFill/>
+            <a:prstDash val="solid"/>
+          </a:ln>
+          <a:effectLst>
+            <a:outerShdw blurRad="63500" dist="19050" dir="5400000" algn="bl" rotWithShape="0">
+              <a:srgbClr val="000000">
+                <a:alpha val="10000"/>
+              </a:srgbClr>
+            </a:outerShdw>
+          </a:effectLst>
+        </p:spPr>
+        <p:txBody>
+          <a:bodyPr anchor="ctr"/>
+          <a:lstStyle/>
+          <a:p>
+            <a:pPr algn="ctr"/>
+            <a:r>
+              <a:rPr lang="en-US" sz="800" dirty="0">
+                <a:solidFill>
+                  <a:srgbClr val="002060"/>
+                </a:solidFill>
+              </a:rPr>
+              <a:t>1st Cross Dock </a:t>
+            </a:r>
+            <a:r>
+              <a:rPr lang="en-US" sz="800" dirty="0" err="1">
+                <a:solidFill>
+                  <a:srgbClr val="002060"/>
+                </a:solidFill>
+              </a:rPr>
+              <a:t>Departcher</a:t>
+            </a:r>
+            <a:r>
+              <a:rPr lang="en-US" sz="800" dirty="0">
+                <a:solidFill>
+                  <a:srgbClr val="002060"/>
+                </a:solidFill>
+              </a:rPr>
+              <a:t> Date &amp; Time</a:t>
+            </a:r>
+            <a:endParaRPr lang="en-ID" sz="800" dirty="0">
+              <a:solidFill>
+                <a:srgbClr val="002060"/>
+              </a:solidFill>
+            </a:endParaRPr>
+          </a:p>
+        </p:txBody>
+      </p:sp>
+      <p:sp>
+        <p:nvSpPr>
+          <p:cNvPr id="66" name="Shape 6">
+            <a:extLst>
+              <a:ext uri="{FF2B5EF4-FFF2-40B4-BE49-F238E27FC236}">
+                <a16:creationId xmlns:a16="http://schemas.microsoft.com/office/drawing/2014/main" id="{E1AE5740-CB2F-9E5F-7E3C-BF0AC499117F}"/>
+              </a:ext>
+            </a:extLst>
+          </p:cNvPr>
+          <p:cNvSpPr/>
+          <p:nvPr/>
+        </p:nvSpPr>
+        <p:spPr>
+          <a:xfrm>
+            <a:off x="1277773" y="4101312"/>
+            <a:ext cx="1063847" cy="243895"/>
+          </a:xfrm>
+          <a:prstGeom prst="roundRect">
+            <a:avLst>
+              <a:gd name="adj" fmla="val 14286"/>
+            </a:avLst>
+          </a:prstGeom>
+          <a:solidFill>
+            <a:srgbClr val="FFFFFF"/>
+          </a:solidFill>
+          <a:ln w="9525">
+            <a:solidFill>
+              <a:srgbClr val="1B3A6B"/>
+            </a:solidFill>
+            <a:prstDash val="solid"/>
+          </a:ln>
+          <a:effectLst>
+            <a:outerShdw blurRad="63500" dist="19050" dir="5400000" algn="bl" rotWithShape="0">
+              <a:srgbClr val="000000">
+                <a:alpha val="10000"/>
+              </a:srgbClr>
+            </a:outerShdw>
+          </a:effectLst>
+        </p:spPr>
+        <p:txBody>
+          <a:bodyPr anchor="ctr"/>
+          <a:lstStyle/>
+          <a:p>
+            <a:pPr algn="ctr"/>
+            <a:r>
+              <a:rPr lang="en-ID" sz="800" dirty="0" err="1"/>
+              <a:t>Bagi</a:t>
+            </a:r>
+            <a:r>
+              <a:rPr lang="en-ID" sz="800" dirty="0"/>
+              <a:t> volume (max cd)</a:t>
+            </a:r>
+          </a:p>
+        </p:txBody>
+      </p:sp>
+      <p:cxnSp>
+        <p:nvCxnSpPr>
+          <p:cNvPr id="70" name="Straight Arrow Connector 69">
+            <a:extLst>
+              <a:ext uri="{FF2B5EF4-FFF2-40B4-BE49-F238E27FC236}">
+                <a16:creationId xmlns:a16="http://schemas.microsoft.com/office/drawing/2014/main" id="{3F6C371C-124A-4CA9-95E5-BA19BBE3DF9F}"/>
+              </a:ext>
+            </a:extLst>
+          </p:cNvPr>
+          <p:cNvCxnSpPr>
+            <a:cxnSpLocks/>
+            <a:stCxn id="62" idx="2"/>
+            <a:endCxn id="66" idx="0"/>
+          </p:cNvCxnSpPr>
+          <p:nvPr/>
+        </p:nvCxnSpPr>
+        <p:spPr>
+          <a:xfrm>
+            <a:off x="1809697" y="3939676"/>
+            <a:ext cx="0" cy="161636"/>
+          </a:xfrm>
+          <a:prstGeom prst="straightConnector1">
+            <a:avLst/>
+          </a:prstGeom>
+          <a:ln>
+            <a:tailEnd type="triangle"/>
+          </a:ln>
+        </p:spPr>
+        <p:style>
+          <a:lnRef idx="2">
+            <a:schemeClr val="accent1"/>
+          </a:lnRef>
+          <a:fillRef idx="0">
+            <a:schemeClr val="accent1"/>
+          </a:fillRef>
+          <a:effectRef idx="1">
+            <a:schemeClr val="accent1"/>
+          </a:effectRef>
+          <a:fontRef idx="minor">
+            <a:schemeClr val="tx1"/>
+          </a:fontRef>
+        </p:style>
+      </p:cxnSp>
+      <p:sp>
+        <p:nvSpPr>
+          <p:cNvPr id="80" name="Flowchart: Magnetic Disk 79">
+            <a:extLst>
+              <a:ext uri="{FF2B5EF4-FFF2-40B4-BE49-F238E27FC236}">
+                <a16:creationId xmlns:a16="http://schemas.microsoft.com/office/drawing/2014/main" id="{8BC09999-28D2-C6C8-E559-5DD18226C068}"/>
+              </a:ext>
+            </a:extLst>
+          </p:cNvPr>
+          <p:cNvSpPr/>
+          <p:nvPr/>
+        </p:nvSpPr>
+        <p:spPr>
+          <a:xfrm>
+            <a:off x="1353596" y="5225386"/>
+            <a:ext cx="895324" cy="250961"/>
+          </a:xfrm>
+          <a:prstGeom prst="flowChartMagneticDisk">
+            <a:avLst/>
+          </a:prstGeom>
+        </p:spPr>
+        <p:style>
+          <a:lnRef idx="2">
+            <a:schemeClr val="accent1">
+              <a:shade val="15000"/>
+            </a:schemeClr>
+          </a:lnRef>
+          <a:fillRef idx="1">
+            <a:schemeClr val="accent1"/>
+          </a:fillRef>
+          <a:effectRef idx="0">
+            <a:schemeClr val="accent1"/>
+          </a:effectRef>
+          <a:fontRef idx="minor">
+            <a:schemeClr val="lt1"/>
+          </a:fontRef>
+        </p:style>
+        <p:txBody>
+          <a:bodyPr rtlCol="0" anchor="ctr"/>
+          <a:lstStyle/>
+          <a:p>
+            <a:pPr algn="ctr"/>
+            <a:endParaRPr lang="en-ID"/>
+          </a:p>
+        </p:txBody>
+      </p:sp>
+      <p:sp>
+        <p:nvSpPr>
+          <p:cNvPr id="81" name="Shape 6">
+            <a:extLst>
+              <a:ext uri="{FF2B5EF4-FFF2-40B4-BE49-F238E27FC236}">
+                <a16:creationId xmlns:a16="http://schemas.microsoft.com/office/drawing/2014/main" id="{DFA58E13-BA87-5112-8663-BDF3E6E2CB77}"/>
+              </a:ext>
+            </a:extLst>
+          </p:cNvPr>
+          <p:cNvSpPr/>
+          <p:nvPr/>
+        </p:nvSpPr>
+        <p:spPr>
+          <a:xfrm>
+            <a:off x="1143064" y="5505908"/>
+            <a:ext cx="1316389" cy="182818"/>
+          </a:xfrm>
+          <a:prstGeom prst="roundRect">
+            <a:avLst>
+              <a:gd name="adj" fmla="val 14286"/>
+            </a:avLst>
+          </a:prstGeom>
+          <a:noFill/>
+          <a:ln w="19050">
+            <a:noFill/>
+            <a:prstDash val="solid"/>
+          </a:ln>
+          <a:effectLst>
+            <a:outerShdw blurRad="63500" dist="19050" dir="5400000" algn="bl" rotWithShape="0">
+              <a:srgbClr val="000000">
+                <a:alpha val="10000"/>
+              </a:srgbClr>
+            </a:outerShdw>
+          </a:effectLst>
+        </p:spPr>
+        <p:txBody>
+          <a:bodyPr anchor="ctr"/>
+          <a:lstStyle/>
+          <a:p>
+            <a:pPr algn="ctr"/>
+            <a:r>
+              <a:rPr lang="en-US" sz="1100" dirty="0">
+                <a:solidFill>
+                  <a:schemeClr val="tx2">
+                    <a:lumMod val="90000"/>
+                    <a:lumOff val="10000"/>
+                  </a:schemeClr>
+                </a:solidFill>
+              </a:rPr>
+              <a:t>Andon Unload</a:t>
+            </a:r>
+            <a:endParaRPr lang="en-ID" sz="1100" dirty="0">
+              <a:solidFill>
+                <a:schemeClr val="tx2">
+                  <a:lumMod val="90000"/>
+                  <a:lumOff val="10000"/>
+                </a:schemeClr>
+              </a:solidFill>
+            </a:endParaRPr>
+          </a:p>
+        </p:txBody>
+      </p:sp>
+      <p:sp>
+        <p:nvSpPr>
+          <p:cNvPr id="83" name="Shape 6">
+            <a:extLst>
+              <a:ext uri="{FF2B5EF4-FFF2-40B4-BE49-F238E27FC236}">
+                <a16:creationId xmlns:a16="http://schemas.microsoft.com/office/drawing/2014/main" id="{5DA1B25C-4ED6-DD5C-290D-05CD729E6667}"/>
+              </a:ext>
+            </a:extLst>
+          </p:cNvPr>
+          <p:cNvSpPr/>
+          <p:nvPr/>
+        </p:nvSpPr>
+        <p:spPr>
+          <a:xfrm>
+            <a:off x="1277773" y="4776076"/>
+            <a:ext cx="1063847" cy="243895"/>
+          </a:xfrm>
+          <a:prstGeom prst="roundRect">
+            <a:avLst>
+              <a:gd name="adj" fmla="val 14286"/>
+            </a:avLst>
+          </a:prstGeom>
+          <a:solidFill>
+            <a:srgbClr val="FFFFFF"/>
+          </a:solidFill>
+          <a:ln w="9525">
+            <a:solidFill>
+              <a:srgbClr val="1B3A6B"/>
+            </a:solidFill>
+            <a:prstDash val="solid"/>
+          </a:ln>
+          <a:effectLst>
+            <a:outerShdw blurRad="63500" dist="19050" dir="5400000" algn="bl" rotWithShape="0">
+              <a:srgbClr val="000000">
+                <a:alpha val="10000"/>
+              </a:srgbClr>
+            </a:outerShdw>
+          </a:effectLst>
+        </p:spPr>
+        <p:txBody>
+          <a:bodyPr anchor="ctr"/>
+          <a:lstStyle/>
+          <a:p>
+            <a:pPr algn="ctr"/>
+            <a:r>
+              <a:rPr lang="en-ID" sz="800" dirty="0"/>
+              <a:t>Cd Unload</a:t>
+            </a:r>
+          </a:p>
+        </p:txBody>
+      </p:sp>
+      <p:sp>
+        <p:nvSpPr>
+          <p:cNvPr id="84" name="Shape 6">
+            <a:extLst>
+              <a:ext uri="{FF2B5EF4-FFF2-40B4-BE49-F238E27FC236}">
+                <a16:creationId xmlns:a16="http://schemas.microsoft.com/office/drawing/2014/main" id="{C7849C52-8C90-CC0D-BBEC-A4BC82CB97D0}"/>
+              </a:ext>
+            </a:extLst>
+          </p:cNvPr>
+          <p:cNvSpPr/>
+          <p:nvPr/>
+        </p:nvSpPr>
+        <p:spPr>
+          <a:xfrm>
+            <a:off x="1277773" y="4448713"/>
+            <a:ext cx="1063847" cy="243895"/>
+          </a:xfrm>
+          <a:prstGeom prst="roundRect">
+            <a:avLst>
+              <a:gd name="adj" fmla="val 14286"/>
+            </a:avLst>
+          </a:prstGeom>
+          <a:solidFill>
+            <a:srgbClr val="FFFFFF"/>
+          </a:solidFill>
+          <a:ln w="9525">
+            <a:solidFill>
+              <a:srgbClr val="1B3A6B"/>
+            </a:solidFill>
+            <a:prstDash val="solid"/>
+          </a:ln>
+          <a:effectLst>
+            <a:outerShdw blurRad="63500" dist="19050" dir="5400000" algn="bl" rotWithShape="0">
+              <a:srgbClr val="000000">
+                <a:alpha val="10000"/>
+              </a:srgbClr>
+            </a:outerShdw>
+          </a:effectLst>
+        </p:spPr>
+        <p:txBody>
+          <a:bodyPr anchor="ctr"/>
+          <a:lstStyle/>
+          <a:p>
+            <a:pPr algn="ctr"/>
+            <a:r>
+              <a:rPr lang="en-ID" sz="800" dirty="0"/>
+              <a:t>Cd Unload</a:t>
+            </a:r>
+          </a:p>
+        </p:txBody>
+      </p:sp>
+    </p:spTree>
+    <p:extLst>
+      <p:ext uri="{BB962C8B-B14F-4D97-AF65-F5344CB8AC3E}">
+        <p14:creationId xmlns:p14="http://schemas.microsoft.com/office/powerpoint/2010/main" val="4229164039"/>
+      </p:ext>
+    </p:extLst>
+  </p:cSld>
+  <p:clrMapOvr>
+    <a:masterClrMapping/>
+  </p:clrMapOvr>
+</p:sld>
+</file>
+
+<file path=ppt/slides/slide14.xml><?xml version="1.0" encoding="utf-8"?>
+<p:sld xmlns:a="http://schemas.openxmlformats.org/drawingml/2006/main" xmlns:r="http://schemas.openxmlformats.org/officeDocument/2006/relationships" xmlns:p="http://schemas.openxmlformats.org/presentationml/2006/main" show="0">
+  <p:cSld>
+    <p:spTree>
+      <p:nvGrpSpPr>
+        <p:cNvPr id="1" name="">
+          <a:extLst>
+            <a:ext uri="{FF2B5EF4-FFF2-40B4-BE49-F238E27FC236}">
+              <a16:creationId xmlns:a16="http://schemas.microsoft.com/office/drawing/2014/main" id="{DC44D453-FA7F-3E96-E3F3-ED1CFE041414}"/>
+            </a:ext>
+          </a:extLst>
+        </p:cNvPr>
+        <p:cNvGrpSpPr/>
+        <p:nvPr/>
+      </p:nvGrpSpPr>
+      <p:grpSpPr>
+        <a:xfrm>
+          <a:off x="0" y="0"/>
+          <a:ext cx="0" cy="0"/>
+          <a:chOff x="0" y="0"/>
+          <a:chExt cx="0" cy="0"/>
+        </a:xfrm>
+      </p:grpSpPr>
+      <p:sp>
+        <p:nvSpPr>
+          <p:cNvPr id="61" name="Shape 8">
+            <a:extLst>
+              <a:ext uri="{FF2B5EF4-FFF2-40B4-BE49-F238E27FC236}">
+                <a16:creationId xmlns:a16="http://schemas.microsoft.com/office/drawing/2014/main" id="{50AFDA0A-8B23-FF7D-2729-835AE719B1FE}"/>
+              </a:ext>
+            </a:extLst>
+          </p:cNvPr>
+          <p:cNvSpPr/>
+          <p:nvPr/>
+        </p:nvSpPr>
+        <p:spPr>
+          <a:xfrm>
+            <a:off x="3383280" y="189863"/>
+            <a:ext cx="5486400" cy="329184"/>
+          </a:xfrm>
+          <a:prstGeom prst="rect">
+            <a:avLst/>
+          </a:prstGeom>
+          <a:solidFill>
+            <a:srgbClr val="FFFFFF"/>
+          </a:solidFill>
+          <a:ln w="9525">
+            <a:solidFill>
+              <a:srgbClr val="D5DBE3"/>
+            </a:solidFill>
+            <a:prstDash val="solid"/>
+          </a:ln>
+        </p:spPr>
+        <p:txBody>
+          <a:bodyPr/>
+          <a:lstStyle/>
+          <a:p>
+            <a:pPr algn="ctr"/>
+            <a:r>
+              <a:rPr lang="en-US" dirty="0" err="1"/>
+              <a:t>Konsep</a:t>
+            </a:r>
+            <a:r>
+              <a:rPr lang="en-US" dirty="0"/>
               <a:t> Flow Data Unload</a:t>
             </a:r>
             <a:endParaRPr lang="en-ID" dirty="0"/>
@@ -20643,8 +22778,8 @@
 </p:sld>
 </file>
 
-<file path=ppt/slides/slide14.xml><?xml version="1.0" encoding="utf-8"?>
-<p:sld xmlns:a="http://schemas.openxmlformats.org/drawingml/2006/main" xmlns:r="http://schemas.openxmlformats.org/officeDocument/2006/relationships" xmlns:p="http://schemas.openxmlformats.org/presentationml/2006/main">
+<file path=ppt/slides/slide15.xml><?xml version="1.0" encoding="utf-8"?>
+<p:sld xmlns:a="http://schemas.openxmlformats.org/drawingml/2006/main" xmlns:r="http://schemas.openxmlformats.org/officeDocument/2006/relationships" xmlns:p="http://schemas.openxmlformats.org/presentationml/2006/main" show="0">
   <p:cSld>
     <p:spTree>
       <p:nvGrpSpPr>
@@ -23257,7 +25392,7 @@
 </p:sld>
 </file>
 
-<file path=ppt/slides/slide15.xml><?xml version="1.0" encoding="utf-8"?>
+<file path=ppt/slides/slide16.xml><?xml version="1.0" encoding="utf-8"?>
 <p:sld xmlns:a="http://schemas.openxmlformats.org/drawingml/2006/main" xmlns:r="http://schemas.openxmlformats.org/officeDocument/2006/relationships" xmlns:p="http://schemas.openxmlformats.org/presentationml/2006/main">
   <p:cSld>
     <p:spTree>
